--- a/outputs/ESG_Momentum_Engine.pptx
+++ b/outputs/ESG_Momentum_Engine.pptx
@@ -3569,8 +3569,8 @@
         </p:nvSpPr>
         <p:spPr>
           <a:xfrm>
-            <a:off x="658368" y="713232"/>
-            <a:ext cx="4572000" cy="1463040"/>
+            <a:off x="713232" y="1097280"/>
+            <a:ext cx="10332720" cy="3017520"/>
           </a:xfrm>
           <a:prstGeom prst="rect">
             <a:avLst/>
@@ -3585,11 +3585,11 @@
           <a:p>
             <a:pPr algn="l">
               <a:lnSpc>
-                <a:spcPct val="94000"/>
+                <a:spcPct val="90000"/>
               </a:lnSpc>
             </a:pPr>
             <a:r>
-              <a:rPr sz="3100" b="1">
+              <a:rPr sz="4400" b="1">
                 <a:solidFill>
                   <a:srgbClr val="0B0B0C"/>
                 </a:solidFill>
@@ -3608,8 +3608,8 @@
         </p:nvSpPr>
         <p:spPr>
           <a:xfrm>
-            <a:off x="694944" y="2423160"/>
-            <a:ext cx="4389120" cy="2468880"/>
+            <a:off x="768096" y="4526280"/>
+            <a:ext cx="8046720" cy="914400"/>
           </a:xfrm>
           <a:prstGeom prst="rect">
             <a:avLst/>
@@ -3628,7 +3628,7 @@
               </a:lnSpc>
             </a:pPr>
             <a:r>
-              <a:rPr sz="1800" b="0">
+              <a:rPr sz="1900" b="0">
                 <a:solidFill>
                   <a:srgbClr val="666663"/>
                 </a:solidFill>
@@ -3638,38 +3638,14 @@
 DROPPED: Yahoo ESG endpoint (HTTP 404); SGX/Bursa disclosures (empty feed).
 Signal families: A sentiment, C fundamentals, F regulatory.
 ICs Newey-West corrected; Benjamini-Hochberg FDR at q=0.10.
-Chart illustrative until Phase 4 is frozen.</a:t>
-            </a:r>
-          </a:p>
-        </p:txBody>
-      </p:sp>
-      <p:pic>
-        <p:nvPicPr>
-          <p:cNvPr id="4" name="Picture 3" descr="ic_bar.png"/>
-          <p:cNvPicPr>
-            <a:picLocks noChangeAspect="1"/>
-          </p:cNvPicPr>
-          <p:nvPr/>
-        </p:nvPicPr>
-        <p:blipFill>
-          <a:blip r:embed="rId2"/>
-          <a:stretch>
-            <a:fillRect/>
-          </a:stretch>
-        </p:blipFill>
-        <p:spPr>
-          <a:xfrm>
-            <a:off x="4499903" y="493776"/>
-            <a:ext cx="8328073" cy="5413248"/>
-          </a:xfrm>
-          <a:prstGeom prst="rect">
-            <a:avLst/>
-          </a:prstGeom>
-        </p:spPr>
-      </p:pic>
-      <p:sp>
-        <p:nvSpPr>
-          <p:cNvPr id="5" name="Rectangle 4"/>
+Frozen result: A3 (attention) and A4 (tone dispersion) survived FDR; A1, C and F did not.</a:t>
+            </a:r>
+          </a:p>
+        </p:txBody>
+      </p:sp>
+      <p:sp>
+        <p:nvSpPr>
+          <p:cNvPr id="4" name="Rectangle 3"/>
           <p:cNvSpPr/>
           <p:nvPr/>
         </p:nvSpPr>
@@ -3712,7 +3688,7 @@
       </p:sp>
       <p:sp>
         <p:nvSpPr>
-          <p:cNvPr id="6" name="TextBox 5"/>
+          <p:cNvPr id="5" name="TextBox 4"/>
           <p:cNvSpPr txBox="1"/>
           <p:nvPr/>
         </p:nvSpPr>
@@ -3744,7 +3720,7 @@
                 </a:solidFill>
                 <a:latin typeface="Inter"/>
               </a:rPr>
-              <a:t>03 / SPLIT</a:t>
+              <a:t>03 / STATEMENT</a:t>
             </a:r>
           </a:p>
         </p:txBody>
@@ -3783,8 +3759,8 @@
         </p:nvSpPr>
         <p:spPr>
           <a:xfrm>
-            <a:off x="658368" y="713232"/>
-            <a:ext cx="4572000" cy="1463040"/>
+            <a:off x="713232" y="1097280"/>
+            <a:ext cx="10332720" cy="3017520"/>
           </a:xfrm>
           <a:prstGeom prst="rect">
             <a:avLst/>
@@ -3799,17 +3775,17 @@
           <a:p>
             <a:pPr algn="l">
               <a:lnSpc>
-                <a:spcPct val="94000"/>
+                <a:spcPct val="90000"/>
               </a:lnSpc>
             </a:pPr>
             <a:r>
-              <a:rPr sz="3100" b="1">
+              <a:rPr sz="4400" b="1">
                 <a:solidFill>
                   <a:srgbClr val="0B0B0C"/>
                 </a:solidFill>
                 <a:latin typeface="Inter"/>
               </a:rPr>
-              <a:t>Validation methodology</a:t>
+              <a:t>Validation: the honest result</a:t>
             </a:r>
           </a:p>
         </p:txBody>
@@ -3822,8 +3798,8 @@
         </p:nvSpPr>
         <p:spPr>
           <a:xfrm>
-            <a:off x="694944" y="2423160"/>
-            <a:ext cx="4389120" cy="2468880"/>
+            <a:off x="768096" y="4526280"/>
+            <a:ext cx="8046720" cy="914400"/>
           </a:xfrm>
           <a:prstGeom prst="rect">
             <a:avLst/>
@@ -3842,48 +3818,24 @@
               </a:lnSpc>
             </a:pPr>
             <a:r>
-              <a:rPr sz="1800" b="0">
+              <a:rPr sz="1900" b="0">
                 <a:solidFill>
                   <a:srgbClr val="666663"/>
                 </a:solidFill>
                 <a:latin typeface="Inter"/>
               </a:rPr>
-              <a:t>Fama-MacBeth regressions with momentum, size, sector and country controls.
-Four composites compared: EIP, TRI, CPS, MASTER.
-Block-bootstrap 95% CIs; train &lt;=2021-12 / test 2022+ enforced once.
-1,000-permutation placebo test - real model in the top 2%.
-Illustrative until Phase 4 is frozen.</a:t>
-            </a:r>
-          </a:p>
-        </p:txBody>
-      </p:sp>
-      <p:pic>
-        <p:nvPicPr>
-          <p:cNvPr id="4" name="Picture 3" descr="placebo_histogram.png"/>
-          <p:cNvPicPr>
-            <a:picLocks noChangeAspect="1"/>
-          </p:cNvPicPr>
-          <p:nvPr/>
-        </p:nvPicPr>
-        <p:blipFill>
-          <a:blip r:embed="rId2"/>
-          <a:stretch>
-            <a:fillRect/>
-          </a:stretch>
-        </p:blipFill>
-        <p:spPr>
-          <a:xfrm>
-            <a:off x="4499903" y="493776"/>
-            <a:ext cx="8328073" cy="5413248"/>
-          </a:xfrm>
-          <a:prstGeom prst="rect">
-            <a:avLst/>
-          </a:prstGeom>
-        </p:spPr>
-      </p:pic>
-      <p:sp>
-        <p:nvSpPr>
-          <p:cNvPr id="5" name="Rectangle 4"/>
+              <a:t>Fama-MacBeth with momentum/size/sector/country controls; FDR q=0.10; test window touched once.
+Survivors: A3 (attention), A4 (tone dispersion). A1 (sentiment velocity) did NOT survive.
+Winner MASTER: net Q5-Q1 +6.8%/yr, but 95% CI [-1.8%, +15.8%] straddles zero - not significant net of costs.
+Gross placebo p=0.003 (signal real before costs); Deflated Sharpe 0.753; out-of-sample IC ~ 0.
+Honest reading: the gross signal is real; realistic costs erode it to inconclusive at net level.</a:t>
+            </a:r>
+          </a:p>
+        </p:txBody>
+      </p:sp>
+      <p:sp>
+        <p:nvSpPr>
+          <p:cNvPr id="4" name="Rectangle 3"/>
           <p:cNvSpPr/>
           <p:nvPr/>
         </p:nvSpPr>
@@ -3926,7 +3878,7 @@
       </p:sp>
       <p:sp>
         <p:nvSpPr>
-          <p:cNvPr id="6" name="TextBox 5"/>
+          <p:cNvPr id="5" name="TextBox 4"/>
           <p:cNvSpPr txBox="1"/>
           <p:nvPr/>
         </p:nvSpPr>
@@ -3958,7 +3910,7 @@
                 </a:solidFill>
                 <a:latin typeface="Inter"/>
               </a:rPr>
-              <a:t>04 / SPLIT</a:t>
+              <a:t>04 / STATEMENT</a:t>
             </a:r>
           </a:p>
         </p:txBody>
@@ -4445,7 +4397,7 @@
                 </a:solidFill>
                 <a:latin typeface="Inter"/>
               </a:rPr>
-              <a:t>ESG momentum predicts returns before ratings catch up.</a:t>
+              <a:t>We mapped the boundary of where the signal lives.</a:t>
             </a:r>
           </a:p>
         </p:txBody>
@@ -4484,8 +4436,9 @@
                 </a:solidFill>
                 <a:latin typeface="Inter"/>
               </a:rPr>
-              <a:t>3 signal families, 4 composites, a 198-name ASEAN universe.
-Next: licensed ESG data -&gt; full disclosure feed -&gt; live pipeline.
+              <a:t>A real GROSS sentiment-attention signal (placebo p=0.003); net of costs the edge is inconclusive.
+Rigorous by construction: FDR, Deflated Sharpe, placebo, a touched-once out-of-sample window.
+Next: licensed point-in-time ESG data restores the dropped families and sharpens the test.
 backtesters.vercel.app</a:t>
             </a:r>
           </a:p>
